--- a/Module 1/Module 1.pptx
+++ b/Module 1/Module 1.pptx
@@ -134,6 +134,95 @@
 </p:presentation>
 </file>
 
+<file path=ppt/changesInfos/changesInfo1.xml><?xml version="1.0" encoding="utf-8"?>
+<pc:chgInfo xmlns:a="http://schemas.openxmlformats.org/drawingml/2006/main" xmlns:r="http://schemas.openxmlformats.org/officeDocument/2006/relationships" xmlns:ac="http://schemas.microsoft.com/office/drawing/2013/main/command" xmlns:pc="http://schemas.microsoft.com/office/powerpoint/2013/main/command">
+  <pc:docChgLst>
+    <pc:chgData name="Kishore" userId="d5d7dcb1-c230-4dcd-8c6f-b1fcba07fb95" providerId="ADAL" clId="{1AA63CBA-B78F-5B68-980E-9084EFF8E084}"/>
+    <pc:docChg chg="custSel modSld">
+      <pc:chgData name="Kishore" userId="d5d7dcb1-c230-4dcd-8c6f-b1fcba07fb95" providerId="ADAL" clId="{1AA63CBA-B78F-5B68-980E-9084EFF8E084}" dt="2026-05-18T02:42:09.448" v="29" actId="20577"/>
+      <pc:docMkLst>
+        <pc:docMk/>
+      </pc:docMkLst>
+      <pc:sldChg chg="modSp mod">
+        <pc:chgData name="Kishore" userId="d5d7dcb1-c230-4dcd-8c6f-b1fcba07fb95" providerId="ADAL" clId="{1AA63CBA-B78F-5B68-980E-9084EFF8E084}" dt="2026-05-18T02:40:10.037" v="8" actId="20577"/>
+        <pc:sldMkLst>
+          <pc:docMk/>
+          <pc:sldMk cId="1144719468" sldId="256"/>
+        </pc:sldMkLst>
+        <pc:spChg chg="mod">
+          <ac:chgData name="Kishore" userId="d5d7dcb1-c230-4dcd-8c6f-b1fcba07fb95" providerId="ADAL" clId="{1AA63CBA-B78F-5B68-980E-9084EFF8E084}" dt="2026-05-18T02:40:10.037" v="8" actId="20577"/>
+          <ac:spMkLst>
+            <pc:docMk/>
+            <pc:sldMk cId="1144719468" sldId="256"/>
+            <ac:spMk id="9" creationId="{A61D17A2-3DF5-4BC1-97E7-E2FF56B90A33}"/>
+          </ac:spMkLst>
+        </pc:spChg>
+      </pc:sldChg>
+      <pc:sldChg chg="modSp mod">
+        <pc:chgData name="Kishore" userId="d5d7dcb1-c230-4dcd-8c6f-b1fcba07fb95" providerId="ADAL" clId="{1AA63CBA-B78F-5B68-980E-9084EFF8E084}" dt="2026-05-18T02:40:57.380" v="10" actId="27636"/>
+        <pc:sldMkLst>
+          <pc:docMk/>
+          <pc:sldMk cId="788302100" sldId="265"/>
+        </pc:sldMkLst>
+        <pc:spChg chg="mod">
+          <ac:chgData name="Kishore" userId="d5d7dcb1-c230-4dcd-8c6f-b1fcba07fb95" providerId="ADAL" clId="{1AA63CBA-B78F-5B68-980E-9084EFF8E084}" dt="2026-05-18T02:40:57.380" v="10" actId="27636"/>
+          <ac:spMkLst>
+            <pc:docMk/>
+            <pc:sldMk cId="788302100" sldId="265"/>
+            <ac:spMk id="13" creationId="{7D1AC227-4054-4D4D-B7FB-2FD8A5D0623A}"/>
+          </ac:spMkLst>
+        </pc:spChg>
+      </pc:sldChg>
+      <pc:sldChg chg="modSp mod">
+        <pc:chgData name="Kishore" userId="d5d7dcb1-c230-4dcd-8c6f-b1fcba07fb95" providerId="ADAL" clId="{1AA63CBA-B78F-5B68-980E-9084EFF8E084}" dt="2026-05-18T02:41:09.060" v="12" actId="27636"/>
+        <pc:sldMkLst>
+          <pc:docMk/>
+          <pc:sldMk cId="820218342" sldId="266"/>
+        </pc:sldMkLst>
+        <pc:spChg chg="mod">
+          <ac:chgData name="Kishore" userId="d5d7dcb1-c230-4dcd-8c6f-b1fcba07fb95" providerId="ADAL" clId="{1AA63CBA-B78F-5B68-980E-9084EFF8E084}" dt="2026-05-18T02:41:09.060" v="12" actId="27636"/>
+          <ac:spMkLst>
+            <pc:docMk/>
+            <pc:sldMk cId="820218342" sldId="266"/>
+            <ac:spMk id="13" creationId="{600DC7FB-38CE-4300-9BBF-C943062158E6}"/>
+          </ac:spMkLst>
+        </pc:spChg>
+      </pc:sldChg>
+      <pc:sldChg chg="modSp mod">
+        <pc:chgData name="Kishore" userId="d5d7dcb1-c230-4dcd-8c6f-b1fcba07fb95" providerId="ADAL" clId="{1AA63CBA-B78F-5B68-980E-9084EFF8E084}" dt="2026-05-18T02:41:45.917" v="23" actId="20577"/>
+        <pc:sldMkLst>
+          <pc:docMk/>
+          <pc:sldMk cId="267532504" sldId="269"/>
+        </pc:sldMkLst>
+        <pc:spChg chg="mod">
+          <ac:chgData name="Kishore" userId="d5d7dcb1-c230-4dcd-8c6f-b1fcba07fb95" providerId="ADAL" clId="{1AA63CBA-B78F-5B68-980E-9084EFF8E084}" dt="2026-05-18T02:41:45.917" v="23" actId="20577"/>
+          <ac:spMkLst>
+            <pc:docMk/>
+            <pc:sldMk cId="267532504" sldId="269"/>
+            <ac:spMk id="8" creationId="{CE87C059-9ABF-43CF-B61B-4F7CBE985A79}"/>
+          </ac:spMkLst>
+        </pc:spChg>
+      </pc:sldChg>
+      <pc:sldChg chg="modSp mod">
+        <pc:chgData name="Kishore" userId="d5d7dcb1-c230-4dcd-8c6f-b1fcba07fb95" providerId="ADAL" clId="{1AA63CBA-B78F-5B68-980E-9084EFF8E084}" dt="2026-05-18T02:42:09.448" v="29" actId="20577"/>
+        <pc:sldMkLst>
+          <pc:docMk/>
+          <pc:sldMk cId="881202959" sldId="274"/>
+        </pc:sldMkLst>
+        <pc:spChg chg="mod">
+          <ac:chgData name="Kishore" userId="d5d7dcb1-c230-4dcd-8c6f-b1fcba07fb95" providerId="ADAL" clId="{1AA63CBA-B78F-5B68-980E-9084EFF8E084}" dt="2026-05-18T02:42:09.448" v="29" actId="20577"/>
+          <ac:spMkLst>
+            <pc:docMk/>
+            <pc:sldMk cId="881202959" sldId="274"/>
+            <ac:spMk id="8" creationId="{BF06E86D-BA6A-4B82-8FA6-7ED101AF0958}"/>
+          </ac:spMkLst>
+        </pc:spChg>
+      </pc:sldChg>
+    </pc:docChg>
+  </pc:docChgLst>
+</pc:chgInfo>
+</file>
+
 <file path=ppt/notesMasters/notesMaster1.xml><?xml version="1.0" encoding="utf-8"?>
 <p:notesMaster xmlns:a="http://schemas.openxmlformats.org/drawingml/2006/main" xmlns:r="http://schemas.openxmlformats.org/officeDocument/2006/relationships" xmlns:p="http://schemas.openxmlformats.org/presentationml/2006/main">
   <p:cSld>
@@ -9567,7 +9656,7 @@
               </a:defRPr>
             </a:pPr>
             <a:r>
-              <a:rPr sz="3000" b="1">
+              <a:rPr lang="en-US" sz="3000" b="1" dirty="0">
                 <a:solidFill>
                   <a:srgbClr val="FFFFFF"/>
                 </a:solidFill>
@@ -9575,7 +9664,18 @@
                 <a:ea typeface="Caladea"/>
                 <a:cs typeface="Caladea"/>
               </a:rPr>
-              <a:t>Day 1: Fabric Basics for QA</a:t>
+              <a:t>Module</a:t>
+            </a:r>
+            <a:r>
+              <a:rPr sz="3000" b="1" dirty="0">
+                <a:solidFill>
+                  <a:srgbClr val="FFFFFF"/>
+                </a:solidFill>
+                <a:latin typeface="Caladea"/>
+                <a:ea typeface="Caladea"/>
+                <a:cs typeface="Caladea"/>
+              </a:rPr>
+              <a:t> 1: Fabric Basics for QA</a:t>
             </a:r>
           </a:p>
         </p:txBody>
@@ -10785,7 +10885,7 @@
         <p:spPr>
           <a:xfrm>
             <a:off x="1047750" y="3714750"/>
-            <a:ext cx="2971800" cy="1066800"/>
+            <a:ext cx="3524250" cy="1066800"/>
           </a:xfrm>
           <a:prstGeom prst="rect">
             <a:avLst/>
@@ -10806,7 +10906,7 @@
         </p:spPr>
         <p:txBody>
           <a:bodyPr lIns="0" tIns="0" rIns="0" bIns="0" anchor="t">
-            <a:normAutofit fontScale="91503" lnSpcReduction="10000"/>
+            <a:normAutofit fontScale="99003"/>
           </a:bodyPr>
           <a:lstStyle/>
           <a:p>
@@ -10821,7 +10921,7 @@
               </a:defRPr>
             </a:pPr>
             <a:r>
-              <a:rPr sz="1275" b="0">
+              <a:rPr sz="1275" b="0" dirty="0">
                 <a:solidFill>
                   <a:srgbClr val="122033"/>
                 </a:solidFill>
@@ -10829,7 +10929,29 @@
                 <a:ea typeface="Lato"/>
                 <a:cs typeface="Lato"/>
               </a:rPr>
-              <a:t>- Backed by OneLake storage</a:t>
+              <a:t>- Backed by </a:t>
+            </a:r>
+            <a:r>
+              <a:rPr sz="1275" b="0" dirty="0" err="1">
+                <a:solidFill>
+                  <a:srgbClr val="122033"/>
+                </a:solidFill>
+                <a:latin typeface="Lato"/>
+                <a:ea typeface="Lato"/>
+                <a:cs typeface="Lato"/>
+              </a:rPr>
+              <a:t>OneLake</a:t>
+            </a:r>
+            <a:r>
+              <a:rPr sz="1275" b="0" dirty="0">
+                <a:solidFill>
+                  <a:srgbClr val="122033"/>
+                </a:solidFill>
+                <a:latin typeface="Lato"/>
+                <a:ea typeface="Lato"/>
+                <a:cs typeface="Lato"/>
+              </a:rPr>
+              <a:t> storage</a:t>
             </a:r>
           </a:p>
           <a:p>
@@ -10844,7 +10966,7 @@
               </a:defRPr>
             </a:pPr>
             <a:r>
-              <a:rPr sz="1275" b="0">
+              <a:rPr sz="1275" b="0" dirty="0">
                 <a:solidFill>
                   <a:srgbClr val="122033"/>
                 </a:solidFill>
@@ -10867,7 +10989,7 @@
               </a:defRPr>
             </a:pPr>
             <a:r>
-              <a:rPr sz="1275" b="0">
+              <a:rPr sz="1275" b="0" dirty="0">
                 <a:solidFill>
                   <a:srgbClr val="122033"/>
                 </a:solidFill>
@@ -10890,7 +11012,7 @@
               </a:defRPr>
             </a:pPr>
             <a:r>
-              <a:rPr sz="1275" b="0">
+              <a:rPr sz="1275" b="0" dirty="0">
                 <a:solidFill>
                   <a:srgbClr val="122033"/>
                 </a:solidFill>
@@ -11282,7 +11404,7 @@
               </a:defRPr>
             </a:pPr>
             <a:r>
-              <a:rPr sz="1200" b="0">
+              <a:rPr sz="1200" b="0" dirty="0">
                 <a:solidFill>
                   <a:srgbClr val="55606D"/>
                 </a:solidFill>
@@ -12165,7 +12287,7 @@
         <p:spPr>
           <a:xfrm>
             <a:off x="1047750" y="3714750"/>
-            <a:ext cx="2971800" cy="1066800"/>
+            <a:ext cx="3333750" cy="1066800"/>
           </a:xfrm>
           <a:prstGeom prst="rect">
             <a:avLst/>
@@ -12186,7 +12308,7 @@
         </p:spPr>
         <p:txBody>
           <a:bodyPr lIns="0" tIns="0" rIns="0" bIns="0" anchor="t">
-            <a:normAutofit fontScale="88315"/>
+            <a:normAutofit fontScale="95815" lnSpcReduction="10000"/>
           </a:bodyPr>
           <a:lstStyle/>
           <a:p>
@@ -12201,7 +12323,7 @@
               </a:defRPr>
             </a:pPr>
             <a:r>
-              <a:rPr sz="1275" b="0">
+              <a:rPr sz="1275" b="0" dirty="0">
                 <a:solidFill>
                   <a:srgbClr val="122033"/>
                 </a:solidFill>
@@ -12224,7 +12346,7 @@
               </a:defRPr>
             </a:pPr>
             <a:r>
-              <a:rPr sz="1275" b="0">
+              <a:rPr sz="1275" b="0" dirty="0">
                 <a:solidFill>
                   <a:srgbClr val="122033"/>
                 </a:solidFill>
@@ -12247,7 +12369,7 @@
               </a:defRPr>
             </a:pPr>
             <a:r>
-              <a:rPr sz="1275" b="0">
+              <a:rPr sz="1275" b="0" dirty="0">
                 <a:solidFill>
                   <a:srgbClr val="122033"/>
                 </a:solidFill>
@@ -12270,7 +12392,7 @@
               </a:defRPr>
             </a:pPr>
             <a:r>
-              <a:rPr sz="1275" b="0">
+              <a:rPr sz="1275" b="0" dirty="0">
                 <a:solidFill>
                   <a:srgbClr val="122033"/>
                 </a:solidFill>
@@ -16705,7 +16827,7 @@
               </a:defRPr>
             </a:pPr>
             <a:r>
-              <a:rPr sz="2400" b="1">
+              <a:rPr lang="en-US" sz="2400" b="1" dirty="0">
                 <a:solidFill>
                   <a:srgbClr val="122033"/>
                 </a:solidFill>
@@ -16713,7 +16835,18 @@
                 <a:ea typeface="Caladea"/>
                 <a:cs typeface="Caladea"/>
               </a:rPr>
-              <a:t>Day 1 lab outcome and setup</a:t>
+              <a:t>Module</a:t>
+            </a:r>
+            <a:r>
+              <a:rPr sz="2400" b="1" dirty="0">
+                <a:solidFill>
+                  <a:srgbClr val="122033"/>
+                </a:solidFill>
+                <a:latin typeface="Caladea"/>
+                <a:ea typeface="Caladea"/>
+                <a:cs typeface="Caladea"/>
+              </a:rPr>
+              <a:t> 1 lab outcome and setup</a:t>
             </a:r>
           </a:p>
         </p:txBody>
@@ -22557,7 +22690,7 @@
               </a:defRPr>
             </a:pPr>
             <a:r>
-              <a:rPr sz="2400" b="1">
+              <a:rPr sz="2400" b="1" dirty="0">
                 <a:solidFill>
                   <a:srgbClr val="122033"/>
                 </a:solidFill>
@@ -22565,7 +22698,29 @@
                 <a:ea typeface="Caladea"/>
                 <a:cs typeface="Caladea"/>
               </a:rPr>
-              <a:t>Common Day 1 mistakes and quick wins</a:t>
+              <a:t>Common </a:t>
+            </a:r>
+            <a:r>
+              <a:rPr lang="en-US" sz="2400" b="1" dirty="0">
+                <a:solidFill>
+                  <a:srgbClr val="122033"/>
+                </a:solidFill>
+                <a:latin typeface="Caladea"/>
+                <a:ea typeface="Caladea"/>
+                <a:cs typeface="Caladea"/>
+              </a:rPr>
+              <a:t>Module</a:t>
+            </a:r>
+            <a:r>
+              <a:rPr sz="2400" b="1" dirty="0">
+                <a:solidFill>
+                  <a:srgbClr val="122033"/>
+                </a:solidFill>
+                <a:latin typeface="Caladea"/>
+                <a:ea typeface="Caladea"/>
+                <a:cs typeface="Caladea"/>
+              </a:rPr>
+              <a:t> 1 mistakes and quick wins</a:t>
             </a:r>
           </a:p>
         </p:txBody>
